--- a/examples/recreations/25_Dropbox_w-job_search__CES Recap_Modeling_100513_FinalD2/out_mat2ppt.pptx
+++ b/examples/recreations/25_Dropbox_w-job_search__CES Recap_Modeling_100513_FinalD2/out_mat2ppt.pptx
@@ -3270,9 +3270,48 @@
         <p:nvPr/>
       </p:nvGrpSpPr>
       <p:grpSpPr/>
+      <p:sp>
+        <p:nvSpPr>
+          <p:cNvPr id="2" name="Rectangle 1"/>
+          <p:cNvSpPr/>
+          <p:nvPr/>
+        </p:nvSpPr>
+        <p:spPr>
+          <a:xfrm>
+            <a:off x="838200" y="365125"/>
+            <a:ext cx="10515600" cy="1325563"/>
+          </a:xfrm>
+          <a:prstGeom prst="rect">
+            <a:avLst/>
+          </a:prstGeom>
+        </p:spPr>
+        <p:style>
+          <a:lnRef idx="1">
+            <a:schemeClr val="accent1"/>
+          </a:lnRef>
+          <a:fillRef idx="3">
+            <a:schemeClr val="accent1"/>
+          </a:fillRef>
+          <a:effectRef idx="2">
+            <a:schemeClr val="accent1"/>
+          </a:effectRef>
+          <a:fontRef idx="minor">
+            <a:schemeClr val="lt1"/>
+          </a:fontRef>
+        </p:style>
+        <p:txBody>
+          <a:bodyPr rtlCol="0" anchor="ctr"/>
+          <a:lstStyle/>
+          <a:p>
+            <a:r>
+              <a:t>Cable Modeling Approach Overview</a:t>
+            </a:r>
+          </a:p>
+        </p:txBody>
+      </p:sp>
       <p:pic>
         <p:nvPicPr>
-          <p:cNvPr id="2" name="Picture 1" descr="image22.png"/>
+          <p:cNvPr id="3" name="Picture 2" descr="image22.png"/>
           <p:cNvPicPr>
             <a:picLocks noChangeAspect="1"/>
           </p:cNvPicPr>
@@ -3480,9 +3519,292 @@
           </a:prstGeom>
         </p:spPr>
       </p:pic>
-      <p:sp>
-        <p:nvSpPr>
-          <p:cNvPr id="3" name="Rectangle 2"/>
+      <p:pic>
+        <p:nvPicPr>
+          <p:cNvPr id="3" name="Picture 2" descr="image26.png"/>
+          <p:cNvPicPr>
+            <a:picLocks noChangeAspect="1"/>
+          </p:cNvPicPr>
+          <p:nvPr/>
+        </p:nvPicPr>
+        <p:blipFill>
+          <a:blip r:embed="rId3"/>
+          <a:stretch>
+            <a:fillRect/>
+          </a:stretch>
+        </p:blipFill>
+        <p:spPr>
+          <a:xfrm>
+            <a:off x="76200" y="1143000"/>
+            <a:ext cx="4571697" cy="3428773"/>
+          </a:xfrm>
+          <a:prstGeom prst="rect">
+            <a:avLst/>
+          </a:prstGeom>
+        </p:spPr>
+      </p:pic>
+      <p:sp>
+        <p:nvSpPr>
+          <p:cNvPr id="4" name="upArrow 3"/>
+          <p:cNvSpPr/>
+          <p:nvPr/>
+        </p:nvSpPr>
+        <p:spPr>
+          <a:xfrm>
+            <a:off x="2149456" y="2934801"/>
+            <a:ext cx="76200" cy="457200"/>
+          </a:xfrm>
+          <a:prstGeom prst="upArrow">
+            <a:avLst/>
+          </a:prstGeom>
+        </p:spPr>
+        <p:style>
+          <a:lnRef idx="1">
+            <a:schemeClr val="accent1"/>
+          </a:lnRef>
+          <a:fillRef idx="3">
+            <a:schemeClr val="accent1"/>
+          </a:fillRef>
+          <a:effectRef idx="2">
+            <a:schemeClr val="accent1"/>
+          </a:effectRef>
+          <a:fontRef idx="minor">
+            <a:schemeClr val="lt1"/>
+          </a:fontRef>
+        </p:style>
+        <p:txBody>
+          <a:bodyPr rtlCol="0" anchor="ctr"/>
+          <a:lstStyle/>
+          <a:p>
+            <a:pPr algn="ctr"/>
+          </a:p>
+        </p:txBody>
+      </p:sp>
+      <p:sp>
+        <p:nvSpPr>
+          <p:cNvPr id="5" name="upArrow 4"/>
+          <p:cNvSpPr/>
+          <p:nvPr/>
+        </p:nvSpPr>
+        <p:spPr>
+          <a:xfrm>
+            <a:off x="2698713" y="2651143"/>
+            <a:ext cx="76200" cy="457200"/>
+          </a:xfrm>
+          <a:prstGeom prst="upArrow">
+            <a:avLst/>
+          </a:prstGeom>
+        </p:spPr>
+        <p:style>
+          <a:lnRef idx="1">
+            <a:schemeClr val="accent1"/>
+          </a:lnRef>
+          <a:fillRef idx="3">
+            <a:schemeClr val="accent1"/>
+          </a:fillRef>
+          <a:effectRef idx="2">
+            <a:schemeClr val="accent1"/>
+          </a:effectRef>
+          <a:fontRef idx="minor">
+            <a:schemeClr val="lt1"/>
+          </a:fontRef>
+        </p:style>
+        <p:txBody>
+          <a:bodyPr rtlCol="0" anchor="ctr"/>
+          <a:lstStyle/>
+          <a:p>
+            <a:pPr algn="ctr"/>
+          </a:p>
+        </p:txBody>
+      </p:sp>
+      <p:sp>
+        <p:nvSpPr>
+          <p:cNvPr id="6" name="upArrow 5"/>
+          <p:cNvSpPr/>
+          <p:nvPr/>
+        </p:nvSpPr>
+        <p:spPr>
+          <a:xfrm>
+            <a:off x="3048000" y="2590800"/>
+            <a:ext cx="76200" cy="457200"/>
+          </a:xfrm>
+          <a:prstGeom prst="upArrow">
+            <a:avLst/>
+          </a:prstGeom>
+        </p:spPr>
+        <p:style>
+          <a:lnRef idx="1">
+            <a:schemeClr val="accent1"/>
+          </a:lnRef>
+          <a:fillRef idx="3">
+            <a:schemeClr val="accent1"/>
+          </a:fillRef>
+          <a:effectRef idx="2">
+            <a:schemeClr val="accent1"/>
+          </a:effectRef>
+          <a:fontRef idx="minor">
+            <a:schemeClr val="lt1"/>
+          </a:fontRef>
+        </p:style>
+        <p:txBody>
+          <a:bodyPr rtlCol="0" anchor="ctr"/>
+          <a:lstStyle/>
+          <a:p>
+            <a:pPr algn="ctr"/>
+          </a:p>
+        </p:txBody>
+      </p:sp>
+      <p:sp>
+        <p:nvSpPr>
+          <p:cNvPr id="7" name="upArrow 6"/>
+          <p:cNvSpPr/>
+          <p:nvPr/>
+        </p:nvSpPr>
+        <p:spPr>
+          <a:xfrm>
+            <a:off x="3303028" y="2695630"/>
+            <a:ext cx="76200" cy="457200"/>
+          </a:xfrm>
+          <a:prstGeom prst="upArrow">
+            <a:avLst/>
+          </a:prstGeom>
+        </p:spPr>
+        <p:style>
+          <a:lnRef idx="1">
+            <a:schemeClr val="accent1"/>
+          </a:lnRef>
+          <a:fillRef idx="3">
+            <a:schemeClr val="accent1"/>
+          </a:fillRef>
+          <a:effectRef idx="2">
+            <a:schemeClr val="accent1"/>
+          </a:effectRef>
+          <a:fontRef idx="minor">
+            <a:schemeClr val="lt1"/>
+          </a:fontRef>
+        </p:style>
+        <p:txBody>
+          <a:bodyPr rtlCol="0" anchor="ctr"/>
+          <a:lstStyle/>
+          <a:p>
+            <a:pPr algn="ctr"/>
+          </a:p>
+        </p:txBody>
+      </p:sp>
+      <p:sp>
+        <p:nvSpPr>
+          <p:cNvPr id="8" name="upArrow 7"/>
+          <p:cNvSpPr/>
+          <p:nvPr/>
+        </p:nvSpPr>
+        <p:spPr>
+          <a:xfrm>
+            <a:off x="3505200" y="2858601"/>
+            <a:ext cx="76200" cy="457200"/>
+          </a:xfrm>
+          <a:prstGeom prst="upArrow">
+            <a:avLst/>
+          </a:prstGeom>
+        </p:spPr>
+        <p:style>
+          <a:lnRef idx="1">
+            <a:schemeClr val="accent1"/>
+          </a:lnRef>
+          <a:fillRef idx="3">
+            <a:schemeClr val="accent1"/>
+          </a:fillRef>
+          <a:effectRef idx="2">
+            <a:schemeClr val="accent1"/>
+          </a:effectRef>
+          <a:fontRef idx="minor">
+            <a:schemeClr val="lt1"/>
+          </a:fontRef>
+        </p:style>
+        <p:txBody>
+          <a:bodyPr rtlCol="0" anchor="ctr"/>
+          <a:lstStyle/>
+          <a:p>
+            <a:pPr algn="ctr"/>
+          </a:p>
+        </p:txBody>
+      </p:sp>
+      <p:sp>
+        <p:nvSpPr>
+          <p:cNvPr id="9" name="upArrow 8"/>
+          <p:cNvSpPr/>
+          <p:nvPr/>
+        </p:nvSpPr>
+        <p:spPr>
+          <a:xfrm>
+            <a:off x="3694598" y="3042714"/>
+            <a:ext cx="76200" cy="457200"/>
+          </a:xfrm>
+          <a:prstGeom prst="upArrow">
+            <a:avLst/>
+          </a:prstGeom>
+        </p:spPr>
+        <p:style>
+          <a:lnRef idx="1">
+            <a:schemeClr val="accent1"/>
+          </a:lnRef>
+          <a:fillRef idx="3">
+            <a:schemeClr val="accent1"/>
+          </a:fillRef>
+          <a:effectRef idx="2">
+            <a:schemeClr val="accent1"/>
+          </a:effectRef>
+          <a:fontRef idx="minor">
+            <a:schemeClr val="lt1"/>
+          </a:fontRef>
+        </p:style>
+        <p:txBody>
+          <a:bodyPr rtlCol="0" anchor="ctr"/>
+          <a:lstStyle/>
+          <a:p>
+            <a:pPr algn="ctr"/>
+          </a:p>
+        </p:txBody>
+      </p:sp>
+      <p:sp>
+        <p:nvSpPr>
+          <p:cNvPr id="10" name="Oval 9"/>
+          <p:cNvSpPr/>
+          <p:nvPr/>
+        </p:nvSpPr>
+        <p:spPr>
+          <a:xfrm>
+            <a:off x="1981200" y="2286000"/>
+            <a:ext cx="1905000" cy="1600200"/>
+          </a:xfrm>
+          <a:prstGeom prst="ellipse">
+            <a:avLst/>
+          </a:prstGeom>
+        </p:spPr>
+        <p:style>
+          <a:lnRef idx="1">
+            <a:schemeClr val="accent1"/>
+          </a:lnRef>
+          <a:fillRef idx="3">
+            <a:schemeClr val="accent1"/>
+          </a:fillRef>
+          <a:effectRef idx="2">
+            <a:schemeClr val="accent1"/>
+          </a:effectRef>
+          <a:fontRef idx="minor">
+            <a:schemeClr val="lt1"/>
+          </a:fontRef>
+        </p:style>
+        <p:txBody>
+          <a:bodyPr rtlCol="0" anchor="ctr"/>
+          <a:lstStyle/>
+          <a:p>
+            <a:pPr algn="ctr"/>
+          </a:p>
+        </p:txBody>
+      </p:sp>
+      <p:sp>
+        <p:nvSpPr>
+          <p:cNvPr id="11" name="Rectangle 10"/>
           <p:cNvSpPr/>
           <p:nvPr/>
         </p:nvSpPr>
@@ -3521,7 +3843,7 @@
       </p:sp>
       <p:sp>
         <p:nvSpPr>
-          <p:cNvPr id="4" name="upArrow 3"/>
+          <p:cNvPr id="12" name="upArrow 11"/>
           <p:cNvSpPr/>
           <p:nvPr/>
         </p:nvSpPr>
@@ -3558,7 +3880,7 @@
       </p:sp>
       <p:sp>
         <p:nvSpPr>
-          <p:cNvPr id="5" name="Rectangle 4"/>
+          <p:cNvPr id="13" name="Rectangle 12"/>
           <p:cNvSpPr/>
           <p:nvPr/>
         </p:nvSpPr>
@@ -3741,6 +4063,45 @@
         </p:nvSpPr>
         <p:spPr>
           <a:xfrm>
+            <a:off x="838200" y="365125"/>
+            <a:ext cx="10515600" cy="1325563"/>
+          </a:xfrm>
+          <a:prstGeom prst="rect">
+            <a:avLst/>
+          </a:prstGeom>
+        </p:spPr>
+        <p:style>
+          <a:lnRef idx="1">
+            <a:schemeClr val="accent1"/>
+          </a:lnRef>
+          <a:fillRef idx="3">
+            <a:schemeClr val="accent1"/>
+          </a:fillRef>
+          <a:effectRef idx="2">
+            <a:schemeClr val="accent1"/>
+          </a:effectRef>
+          <a:fontRef idx="minor">
+            <a:schemeClr val="lt1"/>
+          </a:fontRef>
+        </p:style>
+        <p:txBody>
+          <a:bodyPr rtlCol="0" anchor="ctr"/>
+          <a:lstStyle/>
+          <a:p>
+            <a:r>
+              <a:t>Parameter Estimation: Tie down stiffness</a:t>
+            </a:r>
+          </a:p>
+        </p:txBody>
+      </p:sp>
+      <p:sp>
+        <p:nvSpPr>
+          <p:cNvPr id="3" name="Rectangle 2"/>
+          <p:cNvSpPr/>
+          <p:nvPr/>
+        </p:nvSpPr>
+        <p:spPr>
+          <a:xfrm>
             <a:off x="0" y="1219201"/>
             <a:ext cx="6248400" cy="2438400"/>
           </a:xfrm>
@@ -3774,7 +4135,7 @@
       </p:sp>
       <p:pic>
         <p:nvPicPr>
-          <p:cNvPr id="3" name="Picture 2" descr="image30.emf"/>
+          <p:cNvPr id="4" name="Picture 3" descr="image29.jpeg"/>
           <p:cNvPicPr>
             <a:picLocks noChangeAspect="1"/>
           </p:cNvPicPr>
@@ -3788,6 +4149,69 @@
         </p:blipFill>
         <p:spPr>
           <a:xfrm>
+            <a:off x="4038600" y="4267200"/>
+            <a:ext cx="1779691" cy="2373312"/>
+          </a:xfrm>
+          <a:prstGeom prst="rect">
+            <a:avLst/>
+          </a:prstGeom>
+        </p:spPr>
+      </p:pic>
+      <p:sp>
+        <p:nvSpPr>
+          <p:cNvPr id="5" name="Rectangle 4"/>
+          <p:cNvSpPr/>
+          <p:nvPr/>
+        </p:nvSpPr>
+        <p:spPr>
+          <a:xfrm>
+            <a:off x="4419600" y="4038600"/>
+            <a:ext cx="1524000" cy="340735"/>
+          </a:xfrm>
+          <a:prstGeom prst="rect">
+            <a:avLst/>
+          </a:prstGeom>
+        </p:spPr>
+        <p:style>
+          <a:lnRef idx="1">
+            <a:schemeClr val="accent1"/>
+          </a:lnRef>
+          <a:fillRef idx="3">
+            <a:schemeClr val="accent1"/>
+          </a:fillRef>
+          <a:effectRef idx="2">
+            <a:schemeClr val="accent1"/>
+          </a:effectRef>
+          <a:fontRef idx="minor">
+            <a:schemeClr val="lt1"/>
+          </a:fontRef>
+        </p:style>
+        <p:txBody>
+          <a:bodyPr rtlCol="0" anchor="ctr"/>
+          <a:lstStyle/>
+          <a:p>
+            <a:r>
+              <a:t>Copper Rod</a:t>
+            </a:r>
+          </a:p>
+        </p:txBody>
+      </p:sp>
+      <p:pic>
+        <p:nvPicPr>
+          <p:cNvPr id="6" name="Picture 5" descr="image30.emf"/>
+          <p:cNvPicPr>
+            <a:picLocks noChangeAspect="1"/>
+          </p:cNvPicPr>
+          <p:nvPr/>
+        </p:nvPicPr>
+        <p:blipFill>
+          <a:blip r:embed="rId3"/>
+          <a:stretch>
+            <a:fillRect/>
+          </a:stretch>
+        </p:blipFill>
+        <p:spPr>
+          <a:xfrm>
             <a:off x="152400" y="4343400"/>
             <a:ext cx="5181600" cy="2377631"/>
           </a:xfrm>
@@ -3798,14 +4222,14 @@
       </p:pic>
       <p:pic>
         <p:nvPicPr>
-          <p:cNvPr id="4" name="Picture 3" descr="image31.emf"/>
+          <p:cNvPr id="7" name="Picture 6" descr="image31.emf"/>
           <p:cNvPicPr>
             <a:picLocks noChangeAspect="1"/>
           </p:cNvPicPr>
           <p:nvPr/>
         </p:nvPicPr>
         <p:blipFill>
-          <a:blip r:embed="rId3"/>
+          <a:blip r:embed="rId4"/>
           <a:stretch>
             <a:fillRect/>
           </a:stretch>
@@ -4029,6 +4453,45 @@
         </p:nvSpPr>
         <p:spPr>
           <a:xfrm>
+            <a:off x="838200" y="365125"/>
+            <a:ext cx="10515600" cy="1325563"/>
+          </a:xfrm>
+          <a:prstGeom prst="rect">
+            <a:avLst/>
+          </a:prstGeom>
+        </p:spPr>
+        <p:style>
+          <a:lnRef idx="1">
+            <a:schemeClr val="accent1"/>
+          </a:lnRef>
+          <a:fillRef idx="3">
+            <a:schemeClr val="accent1"/>
+          </a:fillRef>
+          <a:effectRef idx="2">
+            <a:schemeClr val="accent1"/>
+          </a:effectRef>
+          <a:fontRef idx="minor">
+            <a:schemeClr val="lt1"/>
+          </a:fontRef>
+        </p:style>
+        <p:txBody>
+          <a:bodyPr rtlCol="0" anchor="ctr"/>
+          <a:lstStyle/>
+          <a:p>
+            <a:r>
+              <a:t>Cable-on-Beam Results</a:t>
+            </a:r>
+          </a:p>
+        </p:txBody>
+      </p:sp>
+      <p:sp>
+        <p:nvSpPr>
+          <p:cNvPr id="3" name="Rectangle 2"/>
+          <p:cNvSpPr/>
+          <p:nvPr/>
+        </p:nvSpPr>
+        <p:spPr>
+          <a:xfrm>
             <a:off x="0" y="1828800"/>
             <a:ext cx="4191000" cy="4572000"/>
           </a:xfrm>
@@ -4062,7 +4525,7 @@
       </p:sp>
       <p:pic>
         <p:nvPicPr>
-          <p:cNvPr id="3" name="Picture 2" descr="image18.jpeg"/>
+          <p:cNvPr id="4" name="Picture 3" descr="image18.jpeg"/>
           <p:cNvPicPr>
             <a:picLocks noChangeAspect="1"/>
           </p:cNvPicPr>
@@ -4078,6 +4541,216 @@
           <a:xfrm>
             <a:off x="6553200" y="2133600"/>
             <a:ext cx="1095375" cy="666750"/>
+          </a:xfrm>
+          <a:prstGeom prst="rect">
+            <a:avLst/>
+          </a:prstGeom>
+        </p:spPr>
+      </p:pic>
+      <p:pic>
+        <p:nvPicPr>
+          <p:cNvPr id="5" name="Picture 4" descr="image19.png"/>
+          <p:cNvPicPr>
+            <a:picLocks noChangeAspect="1"/>
+          </p:cNvPicPr>
+          <p:nvPr/>
+        </p:nvPicPr>
+        <p:blipFill>
+          <a:blip r:embed="rId3"/>
+          <a:stretch>
+            <a:fillRect/>
+          </a:stretch>
+        </p:blipFill>
+        <p:spPr>
+          <a:xfrm>
+            <a:off x="1219200" y="2971800"/>
+            <a:ext cx="4724400" cy="3702288"/>
+          </a:xfrm>
+          <a:prstGeom prst="rect">
+            <a:avLst/>
+          </a:prstGeom>
+        </p:spPr>
+      </p:pic>
+      <p:cxnSp>
+        <p:nvCxnSpPr>
+          <p:cNvPr id="6" name="Connector 5"/>
+          <p:cNvCxnSpPr/>
+          <p:nvPr/>
+        </p:nvCxnSpPr>
+        <p:spPr>
+          <a:xfrm>
+            <a:off x="1752600" y="4343400"/>
+            <a:ext cx="1295400" cy="1588"/>
+          </a:xfrm>
+          <a:prstGeom prst="straightConnector1">
+            <a:avLst/>
+          </a:prstGeom>
+        </p:spPr>
+        <p:style>
+          <a:lnRef idx="2">
+            <a:schemeClr val="accent1"/>
+          </a:lnRef>
+          <a:fillRef idx="0">
+            <a:schemeClr val="accent1"/>
+          </a:fillRef>
+          <a:effectRef idx="1">
+            <a:schemeClr val="accent1"/>
+          </a:effectRef>
+          <a:fontRef idx="minor">
+            <a:schemeClr val="tx1"/>
+          </a:fontRef>
+        </p:style>
+      </p:cxnSp>
+      <p:cxnSp>
+        <p:nvCxnSpPr>
+          <p:cNvPr id="7" name="Connector 6"/>
+          <p:cNvCxnSpPr/>
+          <p:nvPr/>
+        </p:nvCxnSpPr>
+        <p:spPr>
+          <a:xfrm>
+            <a:off x="3124200" y="6172200"/>
+            <a:ext cx="2743200" cy="1588"/>
+          </a:xfrm>
+          <a:prstGeom prst="straightConnector1">
+            <a:avLst/>
+          </a:prstGeom>
+        </p:spPr>
+        <p:style>
+          <a:lnRef idx="2">
+            <a:schemeClr val="accent1"/>
+          </a:lnRef>
+          <a:fillRef idx="0">
+            <a:schemeClr val="accent1"/>
+          </a:fillRef>
+          <a:effectRef idx="1">
+            <a:schemeClr val="accent1"/>
+          </a:effectRef>
+          <a:fontRef idx="minor">
+            <a:schemeClr val="tx1"/>
+          </a:fontRef>
+        </p:style>
+      </p:cxnSp>
+      <p:sp>
+        <p:nvSpPr>
+          <p:cNvPr id="8" name="Rectangle 7"/>
+          <p:cNvSpPr/>
+          <p:nvPr/>
+        </p:nvSpPr>
+        <p:spPr>
+          <a:xfrm>
+            <a:off x="5105400" y="1295400"/>
+            <a:ext cx="1524000" cy="707886"/>
+          </a:xfrm>
+          <a:prstGeom prst="rect">
+            <a:avLst/>
+          </a:prstGeom>
+        </p:spPr>
+        <p:style>
+          <a:lnRef idx="1">
+            <a:schemeClr val="accent1"/>
+          </a:lnRef>
+          <a:fillRef idx="3">
+            <a:schemeClr val="accent1"/>
+          </a:fillRef>
+          <a:effectRef idx="2">
+            <a:schemeClr val="accent1"/>
+          </a:effectRef>
+          <a:fontRef idx="minor">
+            <a:schemeClr val="lt1"/>
+          </a:fontRef>
+        </p:style>
+        <p:txBody>
+          <a:bodyPr rtlCol="0" anchor="ctr"/>
+          <a:lstStyle/>
+          <a:p>
+            <a:r>
+              <a:t>Cable not resonant</a:t>
+            </a:r>
+          </a:p>
+        </p:txBody>
+      </p:sp>
+      <p:sp>
+        <p:nvSpPr>
+          <p:cNvPr id="9" name="Rectangle 8"/>
+          <p:cNvSpPr/>
+          <p:nvPr/>
+        </p:nvSpPr>
+        <p:spPr>
+          <a:xfrm>
+            <a:off x="7315200" y="5334000"/>
+            <a:ext cx="1524000" cy="707886"/>
+          </a:xfrm>
+          <a:prstGeom prst="rect">
+            <a:avLst/>
+          </a:prstGeom>
+        </p:spPr>
+        <p:style>
+          <a:lnRef idx="1">
+            <a:schemeClr val="accent1"/>
+          </a:lnRef>
+          <a:fillRef idx="3">
+            <a:schemeClr val="accent1"/>
+          </a:fillRef>
+          <a:effectRef idx="2">
+            <a:schemeClr val="accent1"/>
+          </a:effectRef>
+          <a:fontRef idx="minor">
+            <a:schemeClr val="lt1"/>
+          </a:fontRef>
+        </p:style>
+        <p:txBody>
+          <a:bodyPr rtlCol="0" anchor="ctr"/>
+          <a:lstStyle/>
+          <a:p>
+            <a:r>
+              <a:t>Cable resonant</a:t>
+            </a:r>
+          </a:p>
+        </p:txBody>
+      </p:sp>
+      <p:pic>
+        <p:nvPicPr>
+          <p:cNvPr id="10" name="Picture 9" descr="image34.emf"/>
+          <p:cNvPicPr>
+            <a:picLocks noChangeAspect="1"/>
+          </p:cNvPicPr>
+          <p:nvPr/>
+        </p:nvPicPr>
+        <p:blipFill>
+          <a:blip r:embed="rId4"/>
+          <a:stretch>
+            <a:fillRect/>
+          </a:stretch>
+        </p:blipFill>
+        <p:spPr>
+          <a:xfrm>
+            <a:off x="4038600" y="2264053"/>
+            <a:ext cx="5029200" cy="3679547"/>
+          </a:xfrm>
+          <a:prstGeom prst="rect">
+            <a:avLst/>
+          </a:prstGeom>
+        </p:spPr>
+      </p:pic>
+      <p:pic>
+        <p:nvPicPr>
+          <p:cNvPr id="11" name="Picture 10" descr="image34.emf"/>
+          <p:cNvPicPr>
+            <a:picLocks noChangeAspect="1"/>
+          </p:cNvPicPr>
+          <p:nvPr/>
+        </p:nvPicPr>
+        <p:blipFill>
+          <a:blip r:embed="rId5"/>
+          <a:stretch>
+            <a:fillRect/>
+          </a:stretch>
+        </p:blipFill>
+        <p:spPr>
+          <a:xfrm>
+            <a:off x="4642217" y="1295400"/>
+            <a:ext cx="4288791" cy="990600"/>
           </a:xfrm>
           <a:prstGeom prst="rect">
             <a:avLst/>
@@ -4230,6 +4903,45 @@
         </p:nvSpPr>
         <p:spPr>
           <a:xfrm>
+            <a:off x="838200" y="365125"/>
+            <a:ext cx="10515600" cy="1325563"/>
+          </a:xfrm>
+          <a:prstGeom prst="rect">
+            <a:avLst/>
+          </a:prstGeom>
+        </p:spPr>
+        <p:style>
+          <a:lnRef idx="1">
+            <a:schemeClr val="accent1"/>
+          </a:lnRef>
+          <a:fillRef idx="3">
+            <a:schemeClr val="accent1"/>
+          </a:fillRef>
+          <a:effectRef idx="2">
+            <a:schemeClr val="accent1"/>
+          </a:effectRef>
+          <a:fontRef idx="minor">
+            <a:schemeClr val="lt1"/>
+          </a:fontRef>
+        </p:style>
+        <p:txBody>
+          <a:bodyPr rtlCol="0" anchor="ctr"/>
+          <a:lstStyle/>
+          <a:p>
+            <a:r>
+              <a:t>Measured Driving Point FRFs</a:t>
+            </a:r>
+          </a:p>
+        </p:txBody>
+      </p:sp>
+      <p:sp>
+        <p:nvSpPr>
+          <p:cNvPr id="3" name="Rectangle 2"/>
+          <p:cNvSpPr/>
+          <p:nvPr/>
+        </p:nvSpPr>
+        <p:spPr>
+          <a:xfrm>
             <a:off x="152400" y="1239838"/>
             <a:ext cx="4419600" cy="5183187"/>
           </a:xfrm>
@@ -4261,6 +4973,54 @@
           </a:p>
         </p:txBody>
       </p:sp>
+      <p:pic>
+        <p:nvPicPr>
+          <p:cNvPr id="4" name="Picture 3" descr="image36.emf"/>
+          <p:cNvPicPr>
+            <a:picLocks noChangeAspect="1"/>
+          </p:cNvPicPr>
+          <p:nvPr/>
+        </p:nvPicPr>
+        <p:blipFill>
+          <a:blip r:embed="rId2"/>
+          <a:stretch>
+            <a:fillRect/>
+          </a:stretch>
+        </p:blipFill>
+        <p:spPr>
+          <a:xfrm>
+            <a:off x="4572000" y="1524000"/>
+            <a:ext cx="4114800" cy="2743200"/>
+          </a:xfrm>
+          <a:prstGeom prst="rect">
+            <a:avLst/>
+          </a:prstGeom>
+        </p:spPr>
+      </p:pic>
+      <p:pic>
+        <p:nvPicPr>
+          <p:cNvPr id="5" name="Picture 4" descr="image36.emf"/>
+          <p:cNvPicPr>
+            <a:picLocks noChangeAspect="1"/>
+          </p:cNvPicPr>
+          <p:nvPr/>
+        </p:nvPicPr>
+        <p:blipFill>
+          <a:blip r:embed="rId3"/>
+          <a:stretch>
+            <a:fillRect/>
+          </a:stretch>
+        </p:blipFill>
+        <p:spPr>
+          <a:xfrm>
+            <a:off x="5334000" y="4267200"/>
+            <a:ext cx="2743200" cy="228600"/>
+          </a:xfrm>
+          <a:prstGeom prst="rect">
+            <a:avLst/>
+          </a:prstGeom>
+        </p:spPr>
+      </p:pic>
     </p:spTree>
   </p:cSld>
   <p:clrMapOvr>
@@ -4311,8 +5071,8 @@
         </p:nvSpPr>
         <p:spPr>
           <a:xfrm>
-            <a:off x="0" y="1143000"/>
-            <a:ext cx="4800600" cy="5280025"/>
+            <a:off x="838200" y="365125"/>
+            <a:ext cx="10515600" cy="1325563"/>
           </a:xfrm>
           <a:prstGeom prst="rect">
             <a:avLst/>
@@ -4337,14 +5097,53 @@
           <a:lstStyle/>
           <a:p>
             <a:r>
-              <a:t>Compared traditional modelling approach (i.e., nonstructural mass) with dynamic cable modelsRunning RMS metric is driven by modal dampingLumped mass approach does not account for coupling and over estimates responseNonstructural mass approach may be adequate for low frequencies and low cable/structure mass ratios</a:t>
+              <a:t>Panel Model Validation</a:t>
+            </a:r>
+          </a:p>
+        </p:txBody>
+      </p:sp>
+      <p:sp>
+        <p:nvSpPr>
+          <p:cNvPr id="4" name="Rectangle 3"/>
+          <p:cNvSpPr/>
+          <p:nvPr/>
+        </p:nvSpPr>
+        <p:spPr>
+          <a:xfrm>
+            <a:off x="5181600" y="5486400"/>
+            <a:ext cx="3200400" cy="677108"/>
+          </a:xfrm>
+          <a:prstGeom prst="rect">
+            <a:avLst/>
+          </a:prstGeom>
+        </p:spPr>
+        <p:style>
+          <a:lnRef idx="1">
+            <a:schemeClr val="accent1"/>
+          </a:lnRef>
+          <a:fillRef idx="3">
+            <a:schemeClr val="accent1"/>
+          </a:fillRef>
+          <a:effectRef idx="2">
+            <a:schemeClr val="accent1"/>
+          </a:effectRef>
+          <a:fontRef idx="minor">
+            <a:schemeClr val="lt1"/>
+          </a:fontRef>
+        </p:style>
+        <p:txBody>
+          <a:bodyPr rtlCol="0" anchor="ctr"/>
+          <a:lstStyle/>
+          <a:p>
+            <a:r>
+              <a:t>Running RMS error, zeroed at 90 and 200 Hz</a:t>
             </a:r>
           </a:p>
         </p:txBody>
       </p:sp>
       <p:pic>
         <p:nvPicPr>
-          <p:cNvPr id="4" name="Picture 3" descr="image40.emf"/>
+          <p:cNvPr id="5" name="Picture 4" descr="image39.emf"/>
           <p:cNvPicPr>
             <a:picLocks noChangeAspect="1"/>
           </p:cNvPicPr>
@@ -4358,6 +5157,69 @@
         </p:blipFill>
         <p:spPr>
           <a:xfrm>
+            <a:off x="4419600" y="1600200"/>
+            <a:ext cx="4367213" cy="3902075"/>
+          </a:xfrm>
+          <a:prstGeom prst="rect">
+            <a:avLst/>
+          </a:prstGeom>
+        </p:spPr>
+      </p:pic>
+      <p:sp>
+        <p:nvSpPr>
+          <p:cNvPr id="6" name="Rectangle 5"/>
+          <p:cNvSpPr/>
+          <p:nvPr/>
+        </p:nvSpPr>
+        <p:spPr>
+          <a:xfrm>
+            <a:off x="0" y="1143000"/>
+            <a:ext cx="4800600" cy="5280025"/>
+          </a:xfrm>
+          <a:prstGeom prst="rect">
+            <a:avLst/>
+          </a:prstGeom>
+        </p:spPr>
+        <p:style>
+          <a:lnRef idx="1">
+            <a:schemeClr val="accent1"/>
+          </a:lnRef>
+          <a:fillRef idx="3">
+            <a:schemeClr val="accent1"/>
+          </a:fillRef>
+          <a:effectRef idx="2">
+            <a:schemeClr val="accent1"/>
+          </a:effectRef>
+          <a:fontRef idx="minor">
+            <a:schemeClr val="lt1"/>
+          </a:fontRef>
+        </p:style>
+        <p:txBody>
+          <a:bodyPr rtlCol="0" anchor="ctr"/>
+          <a:lstStyle/>
+          <a:p>
+            <a:r>
+              <a:t>Compared traditional modelling approach (i.e., nonstructural mass) with dynamic cable modelsRunning RMS metric is driven by modal dampingLumped mass approach does not account for coupling and over estimates responseNonstructural mass approach may be adequate for low frequencies and low cable/structure mass ratios</a:t>
+            </a:r>
+          </a:p>
+        </p:txBody>
+      </p:sp>
+      <p:pic>
+        <p:nvPicPr>
+          <p:cNvPr id="7" name="Picture 6" descr="image40.emf"/>
+          <p:cNvPicPr>
+            <a:picLocks noChangeAspect="1"/>
+          </p:cNvPicPr>
+          <p:nvPr/>
+        </p:nvPicPr>
+        <p:blipFill>
+          <a:blip r:embed="rId4"/>
+          <a:stretch>
+            <a:fillRect/>
+          </a:stretch>
+        </p:blipFill>
+        <p:spPr>
+          <a:xfrm>
             <a:off x="4724400" y="2057400"/>
             <a:ext cx="4419600" cy="4419600"/>
           </a:xfrm>
@@ -4366,6 +5228,69 @@
           </a:prstGeom>
         </p:spPr>
       </p:pic>
+      <p:pic>
+        <p:nvPicPr>
+          <p:cNvPr id="8" name="Picture 7" descr="image41.emf"/>
+          <p:cNvPicPr>
+            <a:picLocks noChangeAspect="1"/>
+          </p:cNvPicPr>
+          <p:nvPr/>
+        </p:nvPicPr>
+        <p:blipFill>
+          <a:blip r:embed="rId5"/>
+          <a:stretch>
+            <a:fillRect/>
+          </a:stretch>
+        </p:blipFill>
+        <p:spPr>
+          <a:xfrm>
+            <a:off x="4676132" y="1981200"/>
+            <a:ext cx="4467868" cy="4876800"/>
+          </a:xfrm>
+          <a:prstGeom prst="rect">
+            <a:avLst/>
+          </a:prstGeom>
+        </p:spPr>
+      </p:pic>
+      <p:sp>
+        <p:nvSpPr>
+          <p:cNvPr id="9" name="Rectangle 8"/>
+          <p:cNvSpPr/>
+          <p:nvPr/>
+        </p:nvSpPr>
+        <p:spPr>
+          <a:xfrm>
+            <a:off x="4648200" y="5562600"/>
+            <a:ext cx="4495800" cy="923330"/>
+          </a:xfrm>
+          <a:prstGeom prst="rect">
+            <a:avLst/>
+          </a:prstGeom>
+        </p:spPr>
+        <p:style>
+          <a:lnRef idx="1">
+            <a:schemeClr val="accent1"/>
+          </a:lnRef>
+          <a:fillRef idx="3">
+            <a:schemeClr val="accent1"/>
+          </a:fillRef>
+          <a:effectRef idx="2">
+            <a:schemeClr val="accent1"/>
+          </a:effectRef>
+          <a:fontRef idx="minor">
+            <a:schemeClr val="lt1"/>
+          </a:fontRef>
+        </p:style>
+        <p:txBody>
+          <a:bodyPr rtlCol="0" anchor="ctr"/>
+          <a:lstStyle/>
+          <a:p>
+            <a:r>
+              <a:t>Least benefit from dynamic cable models with low mass ratio and/or large magnitude non-interacting modes</a:t>
+            </a:r>
+          </a:p>
+        </p:txBody>
+      </p:sp>
     </p:spTree>
   </p:cSld>
   <p:clrMapOvr>
@@ -4551,6 +5476,45 @@
         </p:nvSpPr>
         <p:spPr>
           <a:xfrm>
+            <a:off x="838200" y="365125"/>
+            <a:ext cx="10515600" cy="1325563"/>
+          </a:xfrm>
+          <a:prstGeom prst="rect">
+            <a:avLst/>
+          </a:prstGeom>
+        </p:spPr>
+        <p:style>
+          <a:lnRef idx="1">
+            <a:schemeClr val="accent1"/>
+          </a:lnRef>
+          <a:fillRef idx="3">
+            <a:schemeClr val="accent1"/>
+          </a:fillRef>
+          <a:effectRef idx="2">
+            <a:schemeClr val="accent1"/>
+          </a:effectRef>
+          <a:fontRef idx="minor">
+            <a:schemeClr val="lt1"/>
+          </a:fontRef>
+        </p:style>
+        <p:txBody>
+          <a:bodyPr rtlCol="0" anchor="ctr"/>
+          <a:lstStyle/>
+          <a:p>
+            <a:r>
+              <a:t>Shear Modulus Choice</a:t>
+            </a:r>
+          </a:p>
+        </p:txBody>
+      </p:sp>
+      <p:sp>
+        <p:nvSpPr>
+          <p:cNvPr id="3" name="Rectangle 2"/>
+          <p:cNvSpPr/>
+          <p:nvPr/>
+        </p:nvSpPr>
+        <p:spPr>
+          <a:xfrm>
             <a:off x="76200" y="1981200"/>
             <a:ext cx="4362450" cy="4441825"/>
           </a:xfrm>
@@ -4584,7 +5548,7 @@
       </p:sp>
       <p:pic>
         <p:nvPicPr>
-          <p:cNvPr id="3" name="Picture 2" descr="image42.emf"/>
+          <p:cNvPr id="4" name="Picture 3" descr="image42.emf"/>
           <p:cNvPicPr>
             <a:picLocks noChangeAspect="1"/>
           </p:cNvPicPr>
@@ -4624,6 +5588,84 @@
         <p:nvPr/>
       </p:nvGrpSpPr>
       <p:grpSpPr/>
+      <p:sp>
+        <p:nvSpPr>
+          <p:cNvPr id="2" name="Rectangle 1"/>
+          <p:cNvSpPr/>
+          <p:nvPr/>
+        </p:nvSpPr>
+        <p:spPr>
+          <a:xfrm>
+            <a:off x="838200" y="365125"/>
+            <a:ext cx="10515600" cy="1325563"/>
+          </a:xfrm>
+          <a:prstGeom prst="rect">
+            <a:avLst/>
+          </a:prstGeom>
+        </p:spPr>
+        <p:style>
+          <a:lnRef idx="1">
+            <a:schemeClr val="accent1"/>
+          </a:lnRef>
+          <a:fillRef idx="3">
+            <a:schemeClr val="accent1"/>
+          </a:fillRef>
+          <a:effectRef idx="2">
+            <a:schemeClr val="accent1"/>
+          </a:effectRef>
+          <a:fontRef idx="minor">
+            <a:schemeClr val="lt1"/>
+          </a:fontRef>
+        </p:style>
+        <p:txBody>
+          <a:bodyPr rtlCol="0" anchor="ctr"/>
+          <a:lstStyle/>
+          <a:p>
+            <a:r>
+              <a:t>Major Findings</a:t>
+            </a:r>
+          </a:p>
+        </p:txBody>
+      </p:sp>
+      <p:sp>
+        <p:nvSpPr>
+          <p:cNvPr id="3" name="Rectangle 2"/>
+          <p:cNvSpPr/>
+          <p:nvPr/>
+        </p:nvSpPr>
+        <p:spPr>
+          <a:xfrm>
+            <a:off x="838200" y="365125"/>
+            <a:ext cx="10515600" cy="1325563"/>
+          </a:xfrm>
+          <a:prstGeom prst="rect">
+            <a:avLst/>
+          </a:prstGeom>
+        </p:spPr>
+        <p:style>
+          <a:lnRef idx="1">
+            <a:schemeClr val="accent1"/>
+          </a:lnRef>
+          <a:fillRef idx="3">
+            <a:schemeClr val="accent1"/>
+          </a:fillRef>
+          <a:effectRef idx="2">
+            <a:schemeClr val="accent1"/>
+          </a:effectRef>
+          <a:fontRef idx="minor">
+            <a:schemeClr val="lt1"/>
+          </a:fontRef>
+        </p:style>
+        <p:txBody>
+          <a:bodyPr rtlCol="0" anchor="ctr"/>
+          <a:lstStyle/>
+          <a:p>
+            <a:r>
+              <a:t>A shear beam model predicts cable dynamicsCoupon tests may be justified for critical applicationsVariability in cable properties can be traced toCable construction due to hand fabrication Differences in wire structural properties can vary between lotsRunning stitch tensionThere is evidence of cable property dependence on spanMeasurement of cable extensional modulus requires a low load capacity tensile test machine and a custom extensometer witness fixtureRod-on-beam validation experiments were instrumental in refining connection stiffness value estimates</a:t>
+            </a:r>
+          </a:p>
+        </p:txBody>
+      </p:sp>
     </p:spTree>
   </p:cSld>
   <p:clrMapOvr>
@@ -4642,6 +5684,84 @@
         <p:nvPr/>
       </p:nvGrpSpPr>
       <p:grpSpPr/>
+      <p:sp>
+        <p:nvSpPr>
+          <p:cNvPr id="2" name="Rectangle 1"/>
+          <p:cNvSpPr/>
+          <p:nvPr/>
+        </p:nvSpPr>
+        <p:spPr>
+          <a:xfrm>
+            <a:off x="838200" y="365125"/>
+            <a:ext cx="10515600" cy="1325563"/>
+          </a:xfrm>
+          <a:prstGeom prst="rect">
+            <a:avLst/>
+          </a:prstGeom>
+        </p:spPr>
+        <p:style>
+          <a:lnRef idx="1">
+            <a:schemeClr val="accent1"/>
+          </a:lnRef>
+          <a:fillRef idx="3">
+            <a:schemeClr val="accent1"/>
+          </a:fillRef>
+          <a:effectRef idx="2">
+            <a:schemeClr val="accent1"/>
+          </a:effectRef>
+          <a:fontRef idx="minor">
+            <a:schemeClr val="lt1"/>
+          </a:fontRef>
+        </p:style>
+        <p:txBody>
+          <a:bodyPr rtlCol="0" anchor="ctr"/>
+          <a:lstStyle/>
+          <a:p>
+            <a:r>
+              <a:t>Summary</a:t>
+            </a:r>
+          </a:p>
+        </p:txBody>
+      </p:sp>
+      <p:sp>
+        <p:nvSpPr>
+          <p:cNvPr id="3" name="Rectangle 2"/>
+          <p:cNvSpPr/>
+          <p:nvPr/>
+        </p:nvSpPr>
+        <p:spPr>
+          <a:xfrm>
+            <a:off x="838200" y="365125"/>
+            <a:ext cx="10515600" cy="1325563"/>
+          </a:xfrm>
+          <a:prstGeom prst="rect">
+            <a:avLst/>
+          </a:prstGeom>
+        </p:spPr>
+        <p:style>
+          <a:lnRef idx="1">
+            <a:schemeClr val="accent1"/>
+          </a:lnRef>
+          <a:fillRef idx="3">
+            <a:schemeClr val="accent1"/>
+          </a:fillRef>
+          <a:effectRef idx="2">
+            <a:schemeClr val="accent1"/>
+          </a:effectRef>
+          <a:fontRef idx="minor">
+            <a:schemeClr val="lt1"/>
+          </a:fontRef>
+        </p:style>
+        <p:txBody>
+          <a:bodyPr rtlCol="0" anchor="ctr"/>
+          <a:lstStyle/>
+          <a:p>
+            <a:r>
+              <a:t>Innovative test, analysis and modelling approaches were developed to Increase accuracy of models to include the influence of power and signal cablesUsed standard linear finite element model methodsCables can have a significant impact on coupled structure dynamicsMass loading on the cable stiffness lineIncreased damping above first cable resonanceLarge reductions in resonant response when cable and host structure natural frequencies are close to one anotherThe traditional nonstructural mass approach cannot predict the cable interaction, leading to overestimates of resonant response</a:t>
+            </a:r>
+          </a:p>
+        </p:txBody>
+      </p:sp>
     </p:spTree>
   </p:cSld>
   <p:clrMapOvr>
@@ -4668,6 +5788,45 @@
         </p:nvSpPr>
         <p:spPr>
           <a:xfrm>
+            <a:off x="838200" y="365125"/>
+            <a:ext cx="10515600" cy="1325563"/>
+          </a:xfrm>
+          <a:prstGeom prst="rect">
+            <a:avLst/>
+          </a:prstGeom>
+        </p:spPr>
+        <p:style>
+          <a:lnRef idx="1">
+            <a:schemeClr val="accent1"/>
+          </a:lnRef>
+          <a:fillRef idx="3">
+            <a:schemeClr val="accent1"/>
+          </a:fillRef>
+          <a:effectRef idx="2">
+            <a:schemeClr val="accent1"/>
+          </a:effectRef>
+          <a:fontRef idx="minor">
+            <a:schemeClr val="lt1"/>
+          </a:fontRef>
+        </p:style>
+        <p:txBody>
+          <a:bodyPr rtlCol="0" anchor="ctr"/>
+          <a:lstStyle/>
+          <a:p>
+            <a:r>
+              <a:t>Open Research Topics</a:t>
+            </a:r>
+          </a:p>
+        </p:txBody>
+      </p:sp>
+      <p:sp>
+        <p:nvSpPr>
+          <p:cNvPr id="3" name="Rectangle 2"/>
+          <p:cNvSpPr/>
+          <p:nvPr/>
+        </p:nvSpPr>
+        <p:spPr>
+          <a:xfrm>
             <a:off x="228600" y="1239838"/>
             <a:ext cx="8763000" cy="5183187"/>
           </a:xfrm>
@@ -4774,6 +5933,84 @@
         <p:nvPr/>
       </p:nvGrpSpPr>
       <p:grpSpPr/>
+      <p:sp>
+        <p:nvSpPr>
+          <p:cNvPr id="2" name="Rectangle 1"/>
+          <p:cNvSpPr/>
+          <p:nvPr/>
+        </p:nvSpPr>
+        <p:spPr>
+          <a:xfrm>
+            <a:off x="838200" y="365125"/>
+            <a:ext cx="10515600" cy="1325563"/>
+          </a:xfrm>
+          <a:prstGeom prst="rect">
+            <a:avLst/>
+          </a:prstGeom>
+        </p:spPr>
+        <p:style>
+          <a:lnRef idx="1">
+            <a:schemeClr val="accent1"/>
+          </a:lnRef>
+          <a:fillRef idx="3">
+            <a:schemeClr val="accent1"/>
+          </a:fillRef>
+          <a:effectRef idx="2">
+            <a:schemeClr val="accent1"/>
+          </a:effectRef>
+          <a:fontRef idx="minor">
+            <a:schemeClr val="lt1"/>
+          </a:fontRef>
+        </p:style>
+        <p:txBody>
+          <a:bodyPr rtlCol="0" anchor="ctr"/>
+          <a:lstStyle/>
+          <a:p>
+            <a:r>
+              <a:t>Acknowledgments</a:t>
+            </a:r>
+          </a:p>
+        </p:txBody>
+      </p:sp>
+      <p:sp>
+        <p:nvSpPr>
+          <p:cNvPr id="3" name="Rectangle 2"/>
+          <p:cNvSpPr/>
+          <p:nvPr/>
+        </p:nvSpPr>
+        <p:spPr>
+          <a:xfrm>
+            <a:off x="838200" y="365125"/>
+            <a:ext cx="10515600" cy="1325563"/>
+          </a:xfrm>
+          <a:prstGeom prst="rect">
+            <a:avLst/>
+          </a:prstGeom>
+        </p:spPr>
+        <p:style>
+          <a:lnRef idx="1">
+            <a:schemeClr val="accent1"/>
+          </a:lnRef>
+          <a:fillRef idx="3">
+            <a:schemeClr val="accent1"/>
+          </a:fillRef>
+          <a:effectRef idx="2">
+            <a:schemeClr val="accent1"/>
+          </a:effectRef>
+          <a:fontRef idx="minor">
+            <a:schemeClr val="lt1"/>
+          </a:fontRef>
+        </p:style>
+        <p:txBody>
+          <a:bodyPr rtlCol="0" anchor="ctr"/>
+          <a:lstStyle/>
+          <a:p>
+            <a:r>
+              <a:t>Thanks to the Air Force Research Laboratory and the Air Force Office for Scientific Research for funding.Thanks to the following project collaborators without whom this work would not have been possible.  Dr. Vit Babuška - Sandia National LaboratoriesDr. Emil Ardelean - Schafer CorporationJames Goodding - CSA EngineeringCody Griffee - CSA EngineeringGreg Mehle - CSA EngineeringDr. Lawrence “Robbie” Robertson AFRL, SV*Dr. Steve Lane - AFRL, SV*Brea Ingram- AFRL, SV**AFRL, SV = Air Force Research Laboratory, Space Vehicles Directorate</a:t>
+            </a:r>
+          </a:p>
+        </p:txBody>
+      </p:sp>
     </p:spTree>
   </p:cSld>
   <p:clrMapOvr>
@@ -4792,9 +6029,48 @@
         <p:nvPr/>
       </p:nvGrpSpPr>
       <p:grpSpPr/>
+      <p:sp>
+        <p:nvSpPr>
+          <p:cNvPr id="2" name="Rectangle 1"/>
+          <p:cNvSpPr/>
+          <p:nvPr/>
+        </p:nvSpPr>
+        <p:spPr>
+          <a:xfrm>
+            <a:off x="838200" y="365125"/>
+            <a:ext cx="10515600" cy="1325563"/>
+          </a:xfrm>
+          <a:prstGeom prst="rect">
+            <a:avLst/>
+          </a:prstGeom>
+        </p:spPr>
+        <p:style>
+          <a:lnRef idx="1">
+            <a:schemeClr val="accent1"/>
+          </a:lnRef>
+          <a:fillRef idx="3">
+            <a:schemeClr val="accent1"/>
+          </a:fillRef>
+          <a:effectRef idx="2">
+            <a:schemeClr val="accent1"/>
+          </a:effectRef>
+          <a:fontRef idx="minor">
+            <a:schemeClr val="lt1"/>
+          </a:fontRef>
+        </p:style>
+        <p:txBody>
+          <a:bodyPr rtlCol="0" anchor="ctr"/>
+          <a:lstStyle/>
+          <a:p>
+            <a:r>
+              <a:t>Cable Tie Down Details</a:t>
+            </a:r>
+          </a:p>
+        </p:txBody>
+      </p:sp>
       <p:pic>
         <p:nvPicPr>
-          <p:cNvPr id="2" name="Picture 1" descr="image43.png"/>
+          <p:cNvPr id="3" name="Picture 2" descr="image43.png"/>
           <p:cNvPicPr>
             <a:picLocks noChangeAspect="1"/>
           </p:cNvPicPr>
@@ -5169,7 +6445,7 @@
       </p:sp>
       <p:pic>
         <p:nvPicPr>
-          <p:cNvPr id="4" name="Picture 3" descr="image13.jpeg"/>
+          <p:cNvPr id="4" name="Picture 3" descr="image9.jpeg"/>
           <p:cNvPicPr>
             <a:picLocks noChangeAspect="1"/>
           </p:cNvPicPr>
@@ -5183,8 +6459,8 @@
         </p:blipFill>
         <p:spPr>
           <a:xfrm>
-            <a:off x="2057400" y="4038600"/>
-            <a:ext cx="4800600" cy="914400"/>
+            <a:off x="5943600" y="4419600"/>
+            <a:ext cx="2743200" cy="1783080"/>
           </a:xfrm>
           <a:prstGeom prst="rect">
             <a:avLst/>
@@ -5193,7 +6469,7 @@
       </p:pic>
       <p:pic>
         <p:nvPicPr>
-          <p:cNvPr id="5" name="Picture 4" descr="image14.wmf"/>
+          <p:cNvPr id="5" name="Picture 4" descr="image10.gif"/>
           <p:cNvPicPr>
             <a:picLocks noChangeAspect="1"/>
           </p:cNvPicPr>
@@ -5201,6 +6477,150 @@
         </p:nvPicPr>
         <p:blipFill>
           <a:blip r:embed="rId3"/>
+          <a:stretch>
+            <a:fillRect/>
+          </a:stretch>
+        </p:blipFill>
+        <p:spPr>
+          <a:xfrm>
+            <a:off x="3056025" y="4419599"/>
+            <a:ext cx="2578537" cy="1828800"/>
+          </a:xfrm>
+          <a:prstGeom prst="rect">
+            <a:avLst/>
+          </a:prstGeom>
+        </p:spPr>
+      </p:pic>
+      <p:pic>
+        <p:nvPicPr>
+          <p:cNvPr id="6" name="Picture 5" descr="image11.jpeg"/>
+          <p:cNvPicPr>
+            <a:picLocks noChangeAspect="1"/>
+          </p:cNvPicPr>
+          <p:nvPr/>
+        </p:nvPicPr>
+        <p:blipFill>
+          <a:blip r:embed="rId4"/>
+          <a:stretch>
+            <a:fillRect/>
+          </a:stretch>
+        </p:blipFill>
+        <p:spPr>
+          <a:xfrm>
+            <a:off x="304800" y="4381678"/>
+            <a:ext cx="2442186" cy="1828800"/>
+          </a:xfrm>
+          <a:prstGeom prst="rect">
+            <a:avLst/>
+          </a:prstGeom>
+        </p:spPr>
+      </p:pic>
+      <p:pic>
+        <p:nvPicPr>
+          <p:cNvPr id="7" name="Picture 6" descr="image12.gif"/>
+          <p:cNvPicPr>
+            <a:picLocks noChangeAspect="1"/>
+          </p:cNvPicPr>
+          <p:nvPr/>
+        </p:nvPicPr>
+        <p:blipFill>
+          <a:blip r:embed="rId5"/>
+          <a:stretch>
+            <a:fillRect/>
+          </a:stretch>
+        </p:blipFill>
+        <p:spPr>
+          <a:xfrm>
+            <a:off x="1295400" y="5067301"/>
+            <a:ext cx="1371600" cy="1371600"/>
+          </a:xfrm>
+          <a:prstGeom prst="rect">
+            <a:avLst/>
+          </a:prstGeom>
+        </p:spPr>
+      </p:pic>
+      <p:pic>
+        <p:nvPicPr>
+          <p:cNvPr id="8" name="Picture 7" descr="image12.gif"/>
+          <p:cNvPicPr>
+            <a:picLocks noChangeAspect="1"/>
+          </p:cNvPicPr>
+          <p:nvPr/>
+        </p:nvPicPr>
+        <p:blipFill>
+          <a:blip r:embed="rId6"/>
+          <a:stretch>
+            <a:fillRect/>
+          </a:stretch>
+        </p:blipFill>
+        <p:spPr>
+          <a:xfrm>
+            <a:off x="3505200" y="5067301"/>
+            <a:ext cx="1371600" cy="1371600"/>
+          </a:xfrm>
+          <a:prstGeom prst="rect">
+            <a:avLst/>
+          </a:prstGeom>
+        </p:spPr>
+      </p:pic>
+      <p:pic>
+        <p:nvPicPr>
+          <p:cNvPr id="9" name="Picture 8" descr="image12.gif"/>
+          <p:cNvPicPr>
+            <a:picLocks noChangeAspect="1"/>
+          </p:cNvPicPr>
+          <p:nvPr/>
+        </p:nvPicPr>
+        <p:blipFill>
+          <a:blip r:embed="rId7"/>
+          <a:stretch>
+            <a:fillRect/>
+          </a:stretch>
+        </p:blipFill>
+        <p:spPr>
+          <a:xfrm>
+            <a:off x="6934200" y="5067301"/>
+            <a:ext cx="1371600" cy="1371600"/>
+          </a:xfrm>
+          <a:prstGeom prst="rect">
+            <a:avLst/>
+          </a:prstGeom>
+        </p:spPr>
+      </p:pic>
+      <p:pic>
+        <p:nvPicPr>
+          <p:cNvPr id="10" name="Picture 9" descr="image13.jpeg"/>
+          <p:cNvPicPr>
+            <a:picLocks noChangeAspect="1"/>
+          </p:cNvPicPr>
+          <p:nvPr/>
+        </p:nvPicPr>
+        <p:blipFill>
+          <a:blip r:embed="rId8"/>
+          <a:stretch>
+            <a:fillRect/>
+          </a:stretch>
+        </p:blipFill>
+        <p:spPr>
+          <a:xfrm>
+            <a:off x="2057400" y="4038600"/>
+            <a:ext cx="4800600" cy="914400"/>
+          </a:xfrm>
+          <a:prstGeom prst="rect">
+            <a:avLst/>
+          </a:prstGeom>
+        </p:spPr>
+      </p:pic>
+      <p:pic>
+        <p:nvPicPr>
+          <p:cNvPr id="11" name="Picture 10" descr="image14.wmf"/>
+          <p:cNvPicPr>
+            <a:picLocks noChangeAspect="1"/>
+          </p:cNvPicPr>
+          <p:nvPr/>
+        </p:nvPicPr>
+        <p:blipFill>
+          <a:blip r:embed="rId9"/>
           <a:stretch>
             <a:fillRect/>
           </a:stretch>
@@ -5233,6 +6653,84 @@
         <p:nvPr/>
       </p:nvGrpSpPr>
       <p:grpSpPr/>
+      <p:sp>
+        <p:nvSpPr>
+          <p:cNvPr id="2" name="Rectangle 1"/>
+          <p:cNvSpPr/>
+          <p:nvPr/>
+        </p:nvSpPr>
+        <p:spPr>
+          <a:xfrm>
+            <a:off x="838200" y="365125"/>
+            <a:ext cx="10515600" cy="1325563"/>
+          </a:xfrm>
+          <a:prstGeom prst="rect">
+            <a:avLst/>
+          </a:prstGeom>
+        </p:spPr>
+        <p:style>
+          <a:lnRef idx="1">
+            <a:schemeClr val="accent1"/>
+          </a:lnRef>
+          <a:fillRef idx="3">
+            <a:schemeClr val="accent1"/>
+          </a:fillRef>
+          <a:effectRef idx="2">
+            <a:schemeClr val="accent1"/>
+          </a:effectRef>
+          <a:fontRef idx="minor">
+            <a:schemeClr val="lt1"/>
+          </a:fontRef>
+        </p:style>
+        <p:txBody>
+          <a:bodyPr rtlCol="0" anchor="ctr"/>
+          <a:lstStyle/>
+          <a:p>
+            <a:r>
+              <a:t>The How of the Cable Effects Study</a:t>
+            </a:r>
+          </a:p>
+        </p:txBody>
+      </p:sp>
+      <p:sp>
+        <p:nvSpPr>
+          <p:cNvPr id="3" name="Rectangle 2"/>
+          <p:cNvSpPr/>
+          <p:nvPr/>
+        </p:nvSpPr>
+        <p:spPr>
+          <a:xfrm>
+            <a:off x="838200" y="365125"/>
+            <a:ext cx="10515600" cy="1325563"/>
+          </a:xfrm>
+          <a:prstGeom prst="rect">
+            <a:avLst/>
+          </a:prstGeom>
+        </p:spPr>
+        <p:style>
+          <a:lnRef idx="1">
+            <a:schemeClr val="accent1"/>
+          </a:lnRef>
+          <a:fillRef idx="3">
+            <a:schemeClr val="accent1"/>
+          </a:fillRef>
+          <a:effectRef idx="2">
+            <a:schemeClr val="accent1"/>
+          </a:effectRef>
+          <a:fontRef idx="minor">
+            <a:schemeClr val="lt1"/>
+          </a:fontRef>
+        </p:style>
+        <p:txBody>
+          <a:bodyPr rtlCol="0" anchor="ctr"/>
+          <a:lstStyle/>
+          <a:p>
+            <a:r>
+              <a:t>Cable models are implemented using Nastran standard elements. Well integrated with standard analysis toolsLinear beam elements are appropriate, using composite properties and general formulation.Measurements showed that cable models must include shear: a Bernoulli-Euler beam formulation cannot predict cable dynamicsEquivalent cable properties in the Nastran deck are obtained through experiment and parameter estimationThe cable-to-structure model uses linear spring elements (PBUSH)Spring properties were identified through experiment Validation experiments used throughout the program for cable parameter estimation and modeling techniquesDemonstration experiment to verify methodsValidation and verification – it was a research program</a:t>
+            </a:r>
+          </a:p>
+        </p:txBody>
+      </p:sp>
     </p:spTree>
   </p:cSld>
   <p:clrMapOvr>
@@ -5449,6 +6947,462 @@
           </a:p>
         </p:txBody>
       </p:sp>
+      <p:pic>
+        <p:nvPicPr>
+          <p:cNvPr id="5" name="Picture 4" descr="image16.jpeg"/>
+          <p:cNvPicPr>
+            <a:picLocks noChangeAspect="1"/>
+          </p:cNvPicPr>
+          <p:nvPr/>
+        </p:nvPicPr>
+        <p:blipFill>
+          <a:blip r:embed="rId3"/>
+          <a:stretch>
+            <a:fillRect/>
+          </a:stretch>
+        </p:blipFill>
+        <p:spPr>
+          <a:xfrm>
+            <a:off x="3962400" y="1611313"/>
+            <a:ext cx="1622425" cy="4014787"/>
+          </a:xfrm>
+          <a:prstGeom prst="rect">
+            <a:avLst/>
+          </a:prstGeom>
+        </p:spPr>
+      </p:pic>
+      <p:pic>
+        <p:nvPicPr>
+          <p:cNvPr id="6" name="Picture 5" descr="image17.jpeg"/>
+          <p:cNvPicPr>
+            <a:picLocks noChangeAspect="1"/>
+          </p:cNvPicPr>
+          <p:nvPr/>
+        </p:nvPicPr>
+        <p:blipFill>
+          <a:blip r:embed="rId4"/>
+          <a:stretch>
+            <a:fillRect/>
+          </a:stretch>
+        </p:blipFill>
+        <p:spPr>
+          <a:xfrm>
+            <a:off x="2895600" y="1676400"/>
+            <a:ext cx="927100" cy="3930650"/>
+          </a:xfrm>
+          <a:prstGeom prst="rect">
+            <a:avLst/>
+          </a:prstGeom>
+        </p:spPr>
+      </p:pic>
+      <p:sp>
+        <p:nvSpPr>
+          <p:cNvPr id="7" name="Rectangle 6"/>
+          <p:cNvSpPr/>
+          <p:nvPr/>
+        </p:nvSpPr>
+        <p:spPr>
+          <a:xfrm>
+            <a:off x="3028950" y="2005013"/>
+            <a:ext cx="582613" cy="496887"/>
+          </a:xfrm>
+          <a:prstGeom prst="rect">
+            <a:avLst/>
+          </a:prstGeom>
+        </p:spPr>
+        <p:style>
+          <a:lnRef idx="1">
+            <a:schemeClr val="accent1"/>
+          </a:lnRef>
+          <a:fillRef idx="3">
+            <a:schemeClr val="accent1"/>
+          </a:fillRef>
+          <a:effectRef idx="2">
+            <a:schemeClr val="accent1"/>
+          </a:effectRef>
+          <a:fontRef idx="minor">
+            <a:schemeClr val="lt1"/>
+          </a:fontRef>
+        </p:style>
+        <p:txBody>
+          <a:bodyPr rtlCol="0" anchor="ctr"/>
+          <a:lstStyle/>
+          <a:p>
+            <a:pPr algn="ctr"/>
+          </a:p>
+        </p:txBody>
+      </p:sp>
+      <p:sp>
+        <p:nvSpPr>
+          <p:cNvPr id="8" name="line 7"/>
+          <p:cNvSpPr/>
+          <p:nvPr/>
+        </p:nvSpPr>
+        <p:spPr>
+          <a:xfrm>
+            <a:off x="3621088" y="1843088"/>
+            <a:ext cx="747712" cy="419100"/>
+          </a:xfrm>
+          <a:prstGeom prst="line">
+            <a:avLst/>
+          </a:prstGeom>
+        </p:spPr>
+        <p:style>
+          <a:lnRef idx="1">
+            <a:schemeClr val="accent1"/>
+          </a:lnRef>
+          <a:fillRef idx="3">
+            <a:schemeClr val="accent1"/>
+          </a:fillRef>
+          <a:effectRef idx="2">
+            <a:schemeClr val="accent1"/>
+          </a:effectRef>
+          <a:fontRef idx="minor">
+            <a:schemeClr val="lt1"/>
+          </a:fontRef>
+        </p:style>
+        <p:txBody>
+          <a:bodyPr rtlCol="0" anchor="ctr"/>
+          <a:lstStyle/>
+          <a:p>
+            <a:pPr algn="ctr"/>
+          </a:p>
+        </p:txBody>
+      </p:sp>
+      <p:sp>
+        <p:nvSpPr>
+          <p:cNvPr id="9" name="line 8"/>
+          <p:cNvSpPr/>
+          <p:nvPr/>
+        </p:nvSpPr>
+        <p:spPr>
+          <a:xfrm>
+            <a:off x="2550" y="1849"/>
+            <a:ext cx="230" cy="1"/>
+          </a:xfrm>
+          <a:prstGeom prst="line">
+            <a:avLst/>
+          </a:prstGeom>
+        </p:spPr>
+        <p:style>
+          <a:lnRef idx="1">
+            <a:schemeClr val="accent1"/>
+          </a:lnRef>
+          <a:fillRef idx="3">
+            <a:schemeClr val="accent1"/>
+          </a:fillRef>
+          <a:effectRef idx="2">
+            <a:schemeClr val="accent1"/>
+          </a:effectRef>
+          <a:fontRef idx="minor">
+            <a:schemeClr val="lt1"/>
+          </a:fontRef>
+        </p:style>
+        <p:txBody>
+          <a:bodyPr rtlCol="0" anchor="ctr"/>
+          <a:lstStyle/>
+          <a:p>
+            <a:pPr algn="ctr"/>
+          </a:p>
+        </p:txBody>
+      </p:sp>
+      <p:sp>
+        <p:nvSpPr>
+          <p:cNvPr id="10" name="line 9"/>
+          <p:cNvSpPr/>
+          <p:nvPr/>
+        </p:nvSpPr>
+        <p:spPr>
+          <a:xfrm>
+            <a:off x="2871" y="1851"/>
+            <a:ext cx="230" cy="1"/>
+          </a:xfrm>
+          <a:prstGeom prst="line">
+            <a:avLst/>
+          </a:prstGeom>
+        </p:spPr>
+        <p:style>
+          <a:lnRef idx="1">
+            <a:schemeClr val="accent1"/>
+          </a:lnRef>
+          <a:fillRef idx="3">
+            <a:schemeClr val="accent1"/>
+          </a:fillRef>
+          <a:effectRef idx="2">
+            <a:schemeClr val="accent1"/>
+          </a:effectRef>
+          <a:fontRef idx="minor">
+            <a:schemeClr val="lt1"/>
+          </a:fontRef>
+        </p:style>
+        <p:txBody>
+          <a:bodyPr rtlCol="0" anchor="ctr"/>
+          <a:lstStyle/>
+          <a:p>
+            <a:pPr algn="ctr"/>
+          </a:p>
+        </p:txBody>
+      </p:sp>
+      <p:sp>
+        <p:nvSpPr>
+          <p:cNvPr id="11" name="line 10"/>
+          <p:cNvSpPr/>
+          <p:nvPr/>
+        </p:nvSpPr>
+        <p:spPr>
+          <a:xfrm>
+            <a:off x="2866" y="1802"/>
+            <a:ext cx="0" cy="104"/>
+          </a:xfrm>
+          <a:prstGeom prst="line">
+            <a:avLst/>
+          </a:prstGeom>
+        </p:spPr>
+        <p:style>
+          <a:lnRef idx="1">
+            <a:schemeClr val="accent1"/>
+          </a:lnRef>
+          <a:fillRef idx="3">
+            <a:schemeClr val="accent1"/>
+          </a:fillRef>
+          <a:effectRef idx="2">
+            <a:schemeClr val="accent1"/>
+          </a:effectRef>
+          <a:fontRef idx="minor">
+            <a:schemeClr val="lt1"/>
+          </a:fontRef>
+        </p:style>
+        <p:txBody>
+          <a:bodyPr rtlCol="0" anchor="ctr"/>
+          <a:lstStyle/>
+          <a:p>
+            <a:pPr algn="ctr"/>
+          </a:p>
+        </p:txBody>
+      </p:sp>
+      <p:sp>
+        <p:nvSpPr>
+          <p:cNvPr id="12" name="line 11"/>
+          <p:cNvSpPr/>
+          <p:nvPr/>
+        </p:nvSpPr>
+        <p:spPr>
+          <a:xfrm>
+            <a:off x="2790" y="1804"/>
+            <a:ext cx="0" cy="104"/>
+          </a:xfrm>
+          <a:prstGeom prst="line">
+            <a:avLst/>
+          </a:prstGeom>
+        </p:spPr>
+        <p:style>
+          <a:lnRef idx="1">
+            <a:schemeClr val="accent1"/>
+          </a:lnRef>
+          <a:fillRef idx="3">
+            <a:schemeClr val="accent1"/>
+          </a:fillRef>
+          <a:effectRef idx="2">
+            <a:schemeClr val="accent1"/>
+          </a:effectRef>
+          <a:fontRef idx="minor">
+            <a:schemeClr val="lt1"/>
+          </a:fontRef>
+        </p:style>
+        <p:txBody>
+          <a:bodyPr rtlCol="0" anchor="ctr"/>
+          <a:lstStyle/>
+          <a:p>
+            <a:pPr algn="ctr"/>
+          </a:p>
+        </p:txBody>
+      </p:sp>
+      <p:pic>
+        <p:nvPicPr>
+          <p:cNvPr id="13" name="Picture 12" descr="image18.jpeg"/>
+          <p:cNvPicPr>
+            <a:picLocks noChangeAspect="1"/>
+          </p:cNvPicPr>
+          <p:nvPr/>
+        </p:nvPicPr>
+        <p:blipFill>
+          <a:blip r:embed="rId5"/>
+          <a:stretch>
+            <a:fillRect/>
+          </a:stretch>
+        </p:blipFill>
+        <p:spPr>
+          <a:xfrm>
+            <a:off x="3200400" y="3429000"/>
+            <a:ext cx="1095375" cy="666750"/>
+          </a:xfrm>
+          <a:prstGeom prst="rect">
+            <a:avLst/>
+          </a:prstGeom>
+        </p:spPr>
+      </p:pic>
+      <p:pic>
+        <p:nvPicPr>
+          <p:cNvPr id="14" name="Picture 13" descr="image19.png"/>
+          <p:cNvPicPr>
+            <a:picLocks noChangeAspect="1"/>
+          </p:cNvPicPr>
+          <p:nvPr/>
+        </p:nvPicPr>
+        <p:blipFill>
+          <a:blip r:embed="rId6"/>
+          <a:stretch>
+            <a:fillRect/>
+          </a:stretch>
+        </p:blipFill>
+        <p:spPr>
+          <a:xfrm>
+            <a:off x="1219200" y="2971800"/>
+            <a:ext cx="4724400" cy="3702288"/>
+          </a:xfrm>
+          <a:prstGeom prst="rect">
+            <a:avLst/>
+          </a:prstGeom>
+        </p:spPr>
+      </p:pic>
+      <p:cxnSp>
+        <p:nvCxnSpPr>
+          <p:cNvPr id="15" name="Connector 14"/>
+          <p:cNvCxnSpPr/>
+          <p:nvPr/>
+        </p:nvCxnSpPr>
+        <p:spPr>
+          <a:xfrm>
+            <a:off x="1752600" y="4343400"/>
+            <a:ext cx="1295400" cy="1588"/>
+          </a:xfrm>
+          <a:prstGeom prst="straightConnector1">
+            <a:avLst/>
+          </a:prstGeom>
+        </p:spPr>
+        <p:style>
+          <a:lnRef idx="2">
+            <a:schemeClr val="accent1"/>
+          </a:lnRef>
+          <a:fillRef idx="0">
+            <a:schemeClr val="accent1"/>
+          </a:fillRef>
+          <a:effectRef idx="1">
+            <a:schemeClr val="accent1"/>
+          </a:effectRef>
+          <a:fontRef idx="minor">
+            <a:schemeClr val="tx1"/>
+          </a:fontRef>
+        </p:style>
+      </p:cxnSp>
+      <p:cxnSp>
+        <p:nvCxnSpPr>
+          <p:cNvPr id="16" name="Connector 15"/>
+          <p:cNvCxnSpPr/>
+          <p:nvPr/>
+        </p:nvCxnSpPr>
+        <p:spPr>
+          <a:xfrm>
+            <a:off x="3124200" y="6172200"/>
+            <a:ext cx="2743200" cy="1588"/>
+          </a:xfrm>
+          <a:prstGeom prst="straightConnector1">
+            <a:avLst/>
+          </a:prstGeom>
+        </p:spPr>
+        <p:style>
+          <a:lnRef idx="2">
+            <a:schemeClr val="accent1"/>
+          </a:lnRef>
+          <a:fillRef idx="0">
+            <a:schemeClr val="accent1"/>
+          </a:fillRef>
+          <a:effectRef idx="1">
+            <a:schemeClr val="accent1"/>
+          </a:effectRef>
+          <a:fontRef idx="minor">
+            <a:schemeClr val="tx1"/>
+          </a:fontRef>
+        </p:style>
+      </p:cxnSp>
+      <p:sp>
+        <p:nvSpPr>
+          <p:cNvPr id="17" name="Rectangle 16"/>
+          <p:cNvSpPr/>
+          <p:nvPr/>
+        </p:nvSpPr>
+        <p:spPr>
+          <a:xfrm>
+            <a:off x="0" y="3962400"/>
+            <a:ext cx="1524000" cy="707886"/>
+          </a:xfrm>
+          <a:prstGeom prst="rect">
+            <a:avLst/>
+          </a:prstGeom>
+        </p:spPr>
+        <p:style>
+          <a:lnRef idx="1">
+            <a:schemeClr val="accent1"/>
+          </a:lnRef>
+          <a:fillRef idx="3">
+            <a:schemeClr val="accent1"/>
+          </a:fillRef>
+          <a:effectRef idx="2">
+            <a:schemeClr val="accent1"/>
+          </a:effectRef>
+          <a:fontRef idx="minor">
+            <a:schemeClr val="lt1"/>
+          </a:fontRef>
+        </p:style>
+        <p:txBody>
+          <a:bodyPr rtlCol="0" anchor="ctr"/>
+          <a:lstStyle/>
+          <a:p>
+            <a:r>
+              <a:t>Cable not resonant</a:t>
+            </a:r>
+          </a:p>
+        </p:txBody>
+      </p:sp>
+      <p:sp>
+        <p:nvSpPr>
+          <p:cNvPr id="18" name="Rectangle 17"/>
+          <p:cNvSpPr/>
+          <p:nvPr/>
+        </p:nvSpPr>
+        <p:spPr>
+          <a:xfrm>
+            <a:off x="0" y="5715000"/>
+            <a:ext cx="1524000" cy="707886"/>
+          </a:xfrm>
+          <a:prstGeom prst="rect">
+            <a:avLst/>
+          </a:prstGeom>
+        </p:spPr>
+        <p:style>
+          <a:lnRef idx="1">
+            <a:schemeClr val="accent1"/>
+          </a:lnRef>
+          <a:fillRef idx="3">
+            <a:schemeClr val="accent1"/>
+          </a:fillRef>
+          <a:effectRef idx="2">
+            <a:schemeClr val="accent1"/>
+          </a:effectRef>
+          <a:fontRef idx="minor">
+            <a:schemeClr val="lt1"/>
+          </a:fontRef>
+        </p:style>
+        <p:txBody>
+          <a:bodyPr rtlCol="0" anchor="ctr"/>
+          <a:lstStyle/>
+          <a:p>
+            <a:r>
+              <a:t>Cable resonant</a:t>
+            </a:r>
+          </a:p>
+        </p:txBody>
+      </p:sp>
     </p:spTree>
   </p:cSld>
   <p:clrMapOvr>
@@ -5610,7 +7564,7 @@
       </p:pic>
       <p:pic>
         <p:nvPicPr>
-          <p:cNvPr id="6" name="Picture 5" descr="image21.jpeg"/>
+          <p:cNvPr id="6" name="Picture 5" descr="image16.jpeg"/>
           <p:cNvPicPr>
             <a:picLocks noChangeAspect="1"/>
           </p:cNvPicPr>
@@ -5624,6 +7578,306 @@
         </p:blipFill>
         <p:spPr>
           <a:xfrm>
+            <a:off x="6162393" y="2229212"/>
+            <a:ext cx="1622425" cy="4014787"/>
+          </a:xfrm>
+          <a:prstGeom prst="rect">
+            <a:avLst/>
+          </a:prstGeom>
+        </p:spPr>
+      </p:pic>
+      <p:sp>
+        <p:nvSpPr>
+          <p:cNvPr id="7" name="Rectangle 6"/>
+          <p:cNvSpPr/>
+          <p:nvPr/>
+        </p:nvSpPr>
+        <p:spPr>
+          <a:xfrm>
+            <a:off x="4792065" y="2473466"/>
+            <a:ext cx="1232755" cy="437192"/>
+          </a:xfrm>
+          <a:prstGeom prst="rect">
+            <a:avLst/>
+          </a:prstGeom>
+        </p:spPr>
+        <p:style>
+          <a:lnRef idx="1">
+            <a:schemeClr val="accent1"/>
+          </a:lnRef>
+          <a:fillRef idx="3">
+            <a:schemeClr val="accent1"/>
+          </a:fillRef>
+          <a:effectRef idx="2">
+            <a:schemeClr val="accent1"/>
+          </a:effectRef>
+          <a:fontRef idx="minor">
+            <a:schemeClr val="lt1"/>
+          </a:fontRef>
+        </p:style>
+        <p:txBody>
+          <a:bodyPr rtlCol="0" anchor="ctr"/>
+          <a:lstStyle/>
+          <a:p>
+            <a:r>
+              <a:t>TC-105</a:t>
+            </a:r>
+          </a:p>
+        </p:txBody>
+      </p:sp>
+      <p:sp>
+        <p:nvSpPr>
+          <p:cNvPr id="8" name="Rectangle 7"/>
+          <p:cNvSpPr/>
+          <p:nvPr/>
+        </p:nvSpPr>
+        <p:spPr>
+          <a:xfrm>
+            <a:off x="7973878" y="2787505"/>
+            <a:ext cx="1151626" cy="755338"/>
+          </a:xfrm>
+          <a:prstGeom prst="rect">
+            <a:avLst/>
+          </a:prstGeom>
+        </p:spPr>
+        <p:style>
+          <a:lnRef idx="1">
+            <a:schemeClr val="accent1"/>
+          </a:lnRef>
+          <a:fillRef idx="3">
+            <a:schemeClr val="accent1"/>
+          </a:fillRef>
+          <a:effectRef idx="2">
+            <a:schemeClr val="accent1"/>
+          </a:effectRef>
+          <a:fontRef idx="minor">
+            <a:schemeClr val="lt1"/>
+          </a:fontRef>
+        </p:style>
+        <p:txBody>
+          <a:bodyPr rtlCol="0" anchor="ctr"/>
+          <a:lstStyle/>
+          <a:p>
+            <a:r>
+              <a:t>Lacing cord</a:t>
+            </a:r>
+          </a:p>
+        </p:txBody>
+      </p:sp>
+      <p:sp>
+        <p:nvSpPr>
+          <p:cNvPr id="9" name="Rectangle 8"/>
+          <p:cNvSpPr/>
+          <p:nvPr/>
+        </p:nvSpPr>
+        <p:spPr>
+          <a:xfrm>
+            <a:off x="4902874" y="4460334"/>
+            <a:ext cx="1058626" cy="439246"/>
+          </a:xfrm>
+          <a:prstGeom prst="rect">
+            <a:avLst/>
+          </a:prstGeom>
+        </p:spPr>
+        <p:style>
+          <a:lnRef idx="1">
+            <a:schemeClr val="accent1"/>
+          </a:lnRef>
+          <a:fillRef idx="3">
+            <a:schemeClr val="accent1"/>
+          </a:fillRef>
+          <a:effectRef idx="2">
+            <a:schemeClr val="accent1"/>
+          </a:effectRef>
+          <a:fontRef idx="minor">
+            <a:schemeClr val="lt1"/>
+          </a:fontRef>
+        </p:style>
+        <p:txBody>
+          <a:bodyPr rtlCol="0" anchor="ctr"/>
+          <a:lstStyle/>
+          <a:p>
+            <a:r>
+              <a:t>Cable</a:t>
+            </a:r>
+          </a:p>
+        </p:txBody>
+      </p:sp>
+      <p:sp>
+        <p:nvSpPr>
+          <p:cNvPr id="10" name="Rectangle 9"/>
+          <p:cNvSpPr/>
+          <p:nvPr/>
+        </p:nvSpPr>
+        <p:spPr>
+          <a:xfrm>
+            <a:off x="4667405" y="5236198"/>
+            <a:ext cx="1410840" cy="757390"/>
+          </a:xfrm>
+          <a:prstGeom prst="rect">
+            <a:avLst/>
+          </a:prstGeom>
+        </p:spPr>
+        <p:style>
+          <a:lnRef idx="1">
+            <a:schemeClr val="accent1"/>
+          </a:lnRef>
+          <a:fillRef idx="3">
+            <a:schemeClr val="accent1"/>
+          </a:fillRef>
+          <a:effectRef idx="2">
+            <a:schemeClr val="accent1"/>
+          </a:effectRef>
+          <a:fontRef idx="minor">
+            <a:schemeClr val="lt1"/>
+          </a:fontRef>
+        </p:style>
+        <p:txBody>
+          <a:bodyPr rtlCol="0" anchor="ctr"/>
+          <a:lstStyle/>
+          <a:p>
+            <a:r>
+              <a:t>Base Structure</a:t>
+            </a:r>
+          </a:p>
+        </p:txBody>
+      </p:sp>
+      <p:cxnSp>
+        <p:nvCxnSpPr>
+          <p:cNvPr id="11" name="Connector 10"/>
+          <p:cNvCxnSpPr/>
+          <p:nvPr/>
+        </p:nvCxnSpPr>
+        <p:spPr>
+          <a:xfrm flipV="1">
+            <a:off x="6025569" y="2688881"/>
+            <a:ext cx="1105544" cy="3831"/>
+          </a:xfrm>
+          <a:prstGeom prst="straightConnector1">
+            <a:avLst/>
+          </a:prstGeom>
+        </p:spPr>
+        <p:style>
+          <a:lnRef idx="2">
+            <a:schemeClr val="accent1"/>
+          </a:lnRef>
+          <a:fillRef idx="0">
+            <a:schemeClr val="accent1"/>
+          </a:fillRef>
+          <a:effectRef idx="1">
+            <a:schemeClr val="accent1"/>
+          </a:effectRef>
+          <a:fontRef idx="minor">
+            <a:schemeClr val="tx1"/>
+          </a:fontRef>
+        </p:style>
+      </p:cxnSp>
+      <p:cxnSp>
+        <p:nvCxnSpPr>
+          <p:cNvPr id="12" name="Connector 11"/>
+          <p:cNvCxnSpPr/>
+          <p:nvPr/>
+        </p:nvCxnSpPr>
+        <p:spPr>
+          <a:xfrm>
+            <a:off x="7342268" y="2821498"/>
+            <a:ext cx="632427" cy="343490"/>
+          </a:xfrm>
+          <a:prstGeom prst="straightConnector1">
+            <a:avLst/>
+          </a:prstGeom>
+        </p:spPr>
+        <p:style>
+          <a:lnRef idx="2">
+            <a:schemeClr val="accent1"/>
+          </a:lnRef>
+          <a:fillRef idx="0">
+            <a:schemeClr val="accent1"/>
+          </a:fillRef>
+          <a:effectRef idx="1">
+            <a:schemeClr val="accent1"/>
+          </a:effectRef>
+          <a:fontRef idx="minor">
+            <a:schemeClr val="tx1"/>
+          </a:fontRef>
+        </p:style>
+      </p:cxnSp>
+      <p:cxnSp>
+        <p:nvCxnSpPr>
+          <p:cNvPr id="13" name="Connector 12"/>
+          <p:cNvCxnSpPr/>
+          <p:nvPr/>
+        </p:nvCxnSpPr>
+        <p:spPr>
+          <a:xfrm flipV="1">
+            <a:off x="5961708" y="4474678"/>
+            <a:ext cx="1362547" cy="205270"/>
+          </a:xfrm>
+          <a:prstGeom prst="straightConnector1">
+            <a:avLst/>
+          </a:prstGeom>
+        </p:spPr>
+        <p:style>
+          <a:lnRef idx="2">
+            <a:schemeClr val="accent1"/>
+          </a:lnRef>
+          <a:fillRef idx="0">
+            <a:schemeClr val="accent1"/>
+          </a:fillRef>
+          <a:effectRef idx="1">
+            <a:schemeClr val="accent1"/>
+          </a:effectRef>
+          <a:fontRef idx="minor">
+            <a:schemeClr val="tx1"/>
+          </a:fontRef>
+        </p:style>
+      </p:cxnSp>
+      <p:cxnSp>
+        <p:nvCxnSpPr>
+          <p:cNvPr id="14" name="Connector 13"/>
+          <p:cNvCxnSpPr/>
+          <p:nvPr/>
+        </p:nvCxnSpPr>
+        <p:spPr>
+          <a:xfrm flipV="1">
+            <a:off x="6077407" y="5342827"/>
+            <a:ext cx="794026" cy="272391"/>
+          </a:xfrm>
+          <a:prstGeom prst="straightConnector1">
+            <a:avLst/>
+          </a:prstGeom>
+        </p:spPr>
+        <p:style>
+          <a:lnRef idx="2">
+            <a:schemeClr val="accent1"/>
+          </a:lnRef>
+          <a:fillRef idx="0">
+            <a:schemeClr val="accent1"/>
+          </a:fillRef>
+          <a:effectRef idx="1">
+            <a:schemeClr val="accent1"/>
+          </a:effectRef>
+          <a:fontRef idx="minor">
+            <a:schemeClr val="tx1"/>
+          </a:fontRef>
+        </p:style>
+      </p:cxnSp>
+      <p:pic>
+        <p:nvPicPr>
+          <p:cNvPr id="15" name="Picture 14" descr="image21.jpeg"/>
+          <p:cNvPicPr>
+            <a:picLocks noChangeAspect="1"/>
+          </p:cNvPicPr>
+          <p:nvPr/>
+        </p:nvPicPr>
+        <p:blipFill>
+          <a:blip r:embed="rId4"/>
+          <a:stretch>
+            <a:fillRect/>
+          </a:stretch>
+        </p:blipFill>
+        <p:spPr>
+          <a:xfrm>
             <a:off x="381000" y="3095625"/>
             <a:ext cx="1095375" cy="666750"/>
           </a:xfrm>
@@ -5634,7 +7888,7 @@
       </p:pic>
       <p:cxnSp>
         <p:nvCxnSpPr>
-          <p:cNvPr id="7" name="Connector 6"/>
+          <p:cNvPr id="16" name="Connector 15"/>
           <p:cNvCxnSpPr/>
           <p:nvPr/>
         </p:nvCxnSpPr>
@@ -5664,7 +7918,7 @@
       </p:cxnSp>
       <p:sp>
         <p:nvSpPr>
-          <p:cNvPr id="8" name="Rectangle 7"/>
+          <p:cNvPr id="17" name="Rectangle 16"/>
           <p:cNvSpPr/>
           <p:nvPr/>
         </p:nvSpPr>
@@ -5703,7 +7957,7 @@
       </p:sp>
       <p:sp>
         <p:nvSpPr>
-          <p:cNvPr id="9" name="Rectangle 8"/>
+          <p:cNvPr id="18" name="Rectangle 17"/>
           <p:cNvSpPr/>
           <p:nvPr/>
         </p:nvSpPr>

--- a/examples/recreations/25_Dropbox_w-job_search__CES Recap_Modeling_100513_FinalD2/out_mat2ppt.pptx
+++ b/examples/recreations/25_Dropbox_w-job_search__CES Recap_Modeling_100513_FinalD2/out_mat2ppt.pptx
@@ -3113,46 +3113,9 @@
         <p:nvPr/>
       </p:nvGrpSpPr>
       <p:grpSpPr/>
-      <p:sp>
-        <p:nvSpPr>
-          <p:cNvPr id="2" name="Rectangle 1"/>
-          <p:cNvSpPr/>
-          <p:nvPr/>
-        </p:nvSpPr>
-        <p:spPr>
-          <a:xfrm>
-            <a:off x="190500" y="1219200"/>
-            <a:ext cx="8763000" cy="2362200"/>
-          </a:xfrm>
-          <a:prstGeom prst="rect">
-            <a:avLst/>
-          </a:prstGeom>
-        </p:spPr>
-        <p:style>
-          <a:lnRef idx="1">
-            <a:schemeClr val="accent1"/>
-          </a:lnRef>
-          <a:fillRef idx="3">
-            <a:schemeClr val="accent1"/>
-          </a:fillRef>
-          <a:effectRef idx="2">
-            <a:schemeClr val="accent1"/>
-          </a:effectRef>
-          <a:fontRef idx="minor">
-            <a:schemeClr val="lt1"/>
-          </a:fontRef>
-        </p:style>
-        <p:txBody>
-          <a:bodyPr rtlCol="0" anchor="ctr"/>
-          <a:lstStyle/>
-          <a:p>
-            <a:pPr algn="ctr"/>
-          </a:p>
-        </p:txBody>
-      </p:sp>
       <p:pic>
         <p:nvPicPr>
-          <p:cNvPr id="3" name="Picture 2" descr="image6.png"/>
+          <p:cNvPr id="2" name="Picture 1" descr="image1.png"/>
           <p:cNvPicPr>
             <a:picLocks noChangeAspect="1"/>
           </p:cNvPicPr>
@@ -3166,6 +3129,163 @@
         </p:blipFill>
         <p:spPr>
           <a:xfrm>
+            <a:off x="14288" y="52388"/>
+            <a:ext cx="1189037" cy="969962"/>
+          </a:xfrm>
+          <a:prstGeom prst="rect">
+            <a:avLst/>
+          </a:prstGeom>
+        </p:spPr>
+      </p:pic>
+      <p:pic>
+        <p:nvPicPr>
+          <p:cNvPr id="3" name="Picture 2" descr="image2.png"/>
+          <p:cNvPicPr>
+            <a:picLocks noChangeAspect="1"/>
+          </p:cNvPicPr>
+          <p:nvPr/>
+        </p:nvPicPr>
+        <p:blipFill>
+          <a:blip r:embed="rId3"/>
+          <a:stretch>
+            <a:fillRect/>
+          </a:stretch>
+        </p:blipFill>
+        <p:spPr>
+          <a:xfrm>
+            <a:off x="8153400" y="609600"/>
+            <a:ext cx="990600" cy="169863"/>
+          </a:xfrm>
+          <a:prstGeom prst="rect">
+            <a:avLst/>
+          </a:prstGeom>
+        </p:spPr>
+      </p:pic>
+      <p:pic>
+        <p:nvPicPr>
+          <p:cNvPr id="4" name="Picture 3" descr="image3.png"/>
+          <p:cNvPicPr>
+            <a:picLocks noChangeAspect="1"/>
+          </p:cNvPicPr>
+          <p:nvPr/>
+        </p:nvPicPr>
+        <p:blipFill>
+          <a:blip r:embed="rId4"/>
+          <a:stretch>
+            <a:fillRect/>
+          </a:stretch>
+        </p:blipFill>
+        <p:spPr>
+          <a:xfrm>
+            <a:off x="8077200" y="152400"/>
+            <a:ext cx="471488" cy="450850"/>
+          </a:xfrm>
+          <a:prstGeom prst="rect">
+            <a:avLst/>
+          </a:prstGeom>
+        </p:spPr>
+      </p:pic>
+      <p:pic>
+        <p:nvPicPr>
+          <p:cNvPr id="5" name="Picture 4" descr="image4.png"/>
+          <p:cNvPicPr>
+            <a:picLocks noChangeAspect="1"/>
+          </p:cNvPicPr>
+          <p:nvPr/>
+        </p:nvPicPr>
+        <p:blipFill>
+          <a:blip r:embed="rId5"/>
+          <a:stretch>
+            <a:fillRect/>
+          </a:stretch>
+        </p:blipFill>
+        <p:spPr>
+          <a:xfrm>
+            <a:off x="8624888" y="152400"/>
+            <a:ext cx="519112" cy="493713"/>
+          </a:xfrm>
+          <a:prstGeom prst="rect">
+            <a:avLst/>
+          </a:prstGeom>
+        </p:spPr>
+      </p:pic>
+      <p:pic>
+        <p:nvPicPr>
+          <p:cNvPr id="6" name="Picture 5" descr="image5.jpeg"/>
+          <p:cNvPicPr>
+            <a:picLocks noChangeAspect="1"/>
+          </p:cNvPicPr>
+          <p:nvPr/>
+        </p:nvPicPr>
+        <p:blipFill>
+          <a:blip r:embed="rId6"/>
+          <a:stretch>
+            <a:fillRect/>
+          </a:stretch>
+        </p:blipFill>
+        <p:spPr>
+          <a:xfrm>
+            <a:off x="8153400" y="0"/>
+            <a:ext cx="819150" cy="120650"/>
+          </a:xfrm>
+          <a:prstGeom prst="rect">
+            <a:avLst/>
+          </a:prstGeom>
+        </p:spPr>
+      </p:pic>
+      <p:sp>
+        <p:nvSpPr>
+          <p:cNvPr id="7" name="Rectangle 6"/>
+          <p:cNvSpPr/>
+          <p:nvPr/>
+        </p:nvSpPr>
+        <p:spPr>
+          <a:xfrm>
+            <a:off x="190500" y="1219200"/>
+            <a:ext cx="8763000" cy="2362200"/>
+          </a:xfrm>
+          <a:prstGeom prst="rect">
+            <a:avLst/>
+          </a:prstGeom>
+        </p:spPr>
+        <p:style>
+          <a:lnRef idx="1">
+            <a:schemeClr val="accent1"/>
+          </a:lnRef>
+          <a:fillRef idx="3">
+            <a:schemeClr val="accent1"/>
+          </a:fillRef>
+          <a:effectRef idx="2">
+            <a:schemeClr val="accent1"/>
+          </a:effectRef>
+          <a:fontRef idx="minor">
+            <a:schemeClr val="lt1"/>
+          </a:fontRef>
+        </p:style>
+        <p:txBody>
+          <a:bodyPr rtlCol="0" anchor="ctr"/>
+          <a:lstStyle/>
+          <a:p>
+            <a:pPr algn="ctr"/>
+          </a:p>
+        </p:txBody>
+      </p:sp>
+      <p:pic>
+        <p:nvPicPr>
+          <p:cNvPr id="8" name="Picture 7" descr="image6.png"/>
+          <p:cNvPicPr>
+            <a:picLocks noChangeAspect="1"/>
+          </p:cNvPicPr>
+          <p:nvPr/>
+        </p:nvPicPr>
+        <p:blipFill>
+          <a:blip r:embed="rId7"/>
+          <a:stretch>
+            <a:fillRect/>
+          </a:stretch>
+        </p:blipFill>
+        <p:spPr>
+          <a:xfrm>
             <a:off x="457200" y="4648200"/>
             <a:ext cx="1864775" cy="1524000"/>
           </a:xfrm>
@@ -3176,7 +3296,7 @@
       </p:pic>
       <p:sp>
         <p:nvSpPr>
-          <p:cNvPr id="4" name="Rectangle 3"/>
+          <p:cNvPr id="9" name="Rectangle 8"/>
           <p:cNvSpPr/>
           <p:nvPr/>
         </p:nvSpPr>
@@ -3215,7 +3335,7 @@
       </p:sp>
       <p:sp>
         <p:nvSpPr>
-          <p:cNvPr id="5" name="Rectangle 4"/>
+          <p:cNvPr id="10" name="Rectangle 9"/>
           <p:cNvSpPr/>
           <p:nvPr/>
         </p:nvSpPr>
